--- a/Clase_9/PPT/Clase09-LDA-aplicado_v2.pptx
+++ b/Clase_9/PPT/Clase09-LDA-aplicado_v2.pptx
@@ -2570,8 +2570,8 @@
         </p:nvSpPr>
         <p:spPr>
           <a:xfrm>
-            <a:off x="1143225" y="685800"/>
-            <a:ext cx="4572225" cy="3429000"/>
+            <a:off x="381000" y="685800"/>
+            <a:ext cx="6096000" cy="3429000"/>
           </a:xfrm>
           <a:custGeom>
             <a:avLst/>
@@ -14957,7 +14957,7 @@
               <a:buNone/>
             </a:pPr>
             <a:r>
-              <a:rPr lang="en-US" sz="1500" b="1" i="0" u="none" strike="noStrike" cap="none">
+              <a:rPr lang="en-US" sz="1500" b="1" i="0" u="none" strike="noStrike" cap="none" dirty="0" err="1">
                 <a:solidFill>
                   <a:srgbClr val="0F172A"/>
                 </a:solidFill>
@@ -14966,21 +14966,57 @@
                 <a:cs typeface="Lato"/>
                 <a:sym typeface="Lato"/>
               </a:rPr>
-              <a:t>freq_visitas (+0.82):</a:t>
-            </a:r>
-            <a:r>
-              <a:rPr lang="en-US" sz="1500" b="0" i="0" u="none" strike="noStrike" cap="none">
-                <a:solidFill>
-                  <a:srgbClr val="334155"/>
+              <a:t>freq_visitas</a:t>
+            </a:r>
+            <a:r>
+              <a:rPr lang="en-US" sz="1500" b="1" i="0" u="none" strike="noStrike" cap="none" dirty="0">
+                <a:solidFill>
+                  <a:srgbClr val="0F172A"/>
                 </a:solidFill>
                 <a:latin typeface="Lato"/>
                 <a:ea typeface="Lato"/>
                 <a:cs typeface="Lato"/>
                 <a:sym typeface="Lato"/>
               </a:rPr>
-              <a:t> Define a Familias/Seniors.</a:t>
-            </a:r>
-            <a:endParaRPr/>
+              <a:t> (+0.82):</a:t>
+            </a:r>
+            <a:r>
+              <a:rPr lang="en-US" sz="1500" b="0" i="0" u="none" strike="noStrike" cap="none" dirty="0">
+                <a:solidFill>
+                  <a:srgbClr val="334155"/>
+                </a:solidFill>
+                <a:latin typeface="Lato"/>
+                <a:ea typeface="Lato"/>
+                <a:cs typeface="Lato"/>
+                <a:sym typeface="Lato"/>
+              </a:rPr>
+              <a:t> Define a </a:t>
+            </a:r>
+            <a:r>
+              <a:rPr lang="en-US" sz="1500" b="0" i="0" u="none" strike="noStrike" cap="none" dirty="0" err="1">
+                <a:solidFill>
+                  <a:srgbClr val="334155"/>
+                </a:solidFill>
+                <a:latin typeface="Lato"/>
+                <a:ea typeface="Lato"/>
+                <a:cs typeface="Lato"/>
+                <a:sym typeface="Lato"/>
+              </a:rPr>
+              <a:t>Familias</a:t>
+            </a:r>
+            <a:r>
+              <a:rPr lang="en-US" sz="1500" b="0" i="0" u="none" strike="noStrike" cap="none" dirty="0">
+                <a:solidFill>
+                  <a:srgbClr val="334155"/>
+                </a:solidFill>
+                <a:latin typeface="Lato"/>
+                <a:ea typeface="Lato"/>
+                <a:cs typeface="Lato"/>
+                <a:sym typeface="Lato"/>
+              </a:rPr>
+              <a:t>/Seniors.</a:t>
+            </a:r>
+            <a:endParaRPr dirty="0"/>
           </a:p>
         </p:txBody>
       </p:sp>
@@ -15022,7 +15058,7 @@
               <a:buNone/>
             </a:pPr>
             <a:r>
-              <a:rPr lang="en-US" sz="1500" b="1" i="0" u="none" strike="noStrike" cap="none">
+              <a:rPr lang="en-US" sz="1500" b="1" i="0" u="none" strike="noStrike" cap="none" dirty="0" err="1">
                 <a:solidFill>
                   <a:srgbClr val="0F172A"/>
                 </a:solidFill>
@@ -15031,21 +15067,33 @@
                 <a:cs typeface="Lato"/>
                 <a:sym typeface="Lato"/>
               </a:rPr>
-              <a:t>compras_online (-0.74):</a:t>
-            </a:r>
-            <a:r>
-              <a:rPr lang="en-US" sz="1500" b="0" i="0" u="none" strike="noStrike" cap="none">
-                <a:solidFill>
-                  <a:srgbClr val="334155"/>
+              <a:t>compras_online</a:t>
+            </a:r>
+            <a:r>
+              <a:rPr lang="en-US" sz="1500" b="1" i="0" u="none" strike="noStrike" cap="none" dirty="0">
+                <a:solidFill>
+                  <a:srgbClr val="0F172A"/>
                 </a:solidFill>
                 <a:latin typeface="Lato"/>
                 <a:ea typeface="Lato"/>
                 <a:cs typeface="Lato"/>
                 <a:sym typeface="Lato"/>
               </a:rPr>
+              <a:t> (-0.74):</a:t>
+            </a:r>
+            <a:r>
+              <a:rPr lang="en-US" sz="1500" b="0" i="0" u="none" strike="noStrike" cap="none" dirty="0">
+                <a:solidFill>
+                  <a:srgbClr val="334155"/>
+                </a:solidFill>
+                <a:latin typeface="Lato"/>
+                <a:ea typeface="Lato"/>
+                <a:cs typeface="Lato"/>
+                <a:sym typeface="Lato"/>
+              </a:rPr>
               <a:t> Distingue al Joven Urbano.</a:t>
             </a:r>
-            <a:endParaRPr/>
+            <a:endParaRPr dirty="0"/>
           </a:p>
         </p:txBody>
       </p:sp>
@@ -15087,7 +15135,7 @@
               <a:buNone/>
             </a:pPr>
             <a:r>
-              <a:rPr lang="en-US" sz="1500" b="1" i="0" u="none" strike="noStrike" cap="none">
+              <a:rPr lang="en-US" sz="1500" b="1" i="0" u="none" strike="noStrike" cap="none" dirty="0" err="1">
                 <a:solidFill>
                   <a:srgbClr val="0F172A"/>
                 </a:solidFill>
@@ -15096,21 +15144,81 @@
                 <a:cs typeface="Lato"/>
                 <a:sym typeface="Lato"/>
               </a:rPr>
-              <a:t>ticket_prom (+0.61):</a:t>
-            </a:r>
-            <a:r>
-              <a:rPr lang="en-US" sz="1500" b="0" i="0" u="none" strike="noStrike" cap="none">
-                <a:solidFill>
-                  <a:srgbClr val="334155"/>
+              <a:t>ticket_prom</a:t>
+            </a:r>
+            <a:r>
+              <a:rPr lang="en-US" sz="1500" b="1" i="0" u="none" strike="noStrike" cap="none" dirty="0">
+                <a:solidFill>
+                  <a:srgbClr val="0F172A"/>
                 </a:solidFill>
                 <a:latin typeface="Lato"/>
                 <a:ea typeface="Lato"/>
                 <a:cs typeface="Lato"/>
                 <a:sym typeface="Lato"/>
               </a:rPr>
-              <a:t> Clave para el perfil Familiar.</a:t>
-            </a:r>
-            <a:endParaRPr/>
+              <a:t> (+0.61):</a:t>
+            </a:r>
+            <a:r>
+              <a:rPr lang="en-US" sz="1500" b="0" i="0" u="none" strike="noStrike" cap="none" dirty="0">
+                <a:solidFill>
+                  <a:srgbClr val="334155"/>
+                </a:solidFill>
+                <a:latin typeface="Lato"/>
+                <a:ea typeface="Lato"/>
+                <a:cs typeface="Lato"/>
+                <a:sym typeface="Lato"/>
+              </a:rPr>
+              <a:t> Clave para </a:t>
+            </a:r>
+            <a:r>
+              <a:rPr lang="en-US" sz="1500" b="0" i="0" u="none" strike="noStrike" cap="none" dirty="0" err="1">
+                <a:solidFill>
+                  <a:srgbClr val="334155"/>
+                </a:solidFill>
+                <a:latin typeface="Lato"/>
+                <a:ea typeface="Lato"/>
+                <a:cs typeface="Lato"/>
+                <a:sym typeface="Lato"/>
+              </a:rPr>
+              <a:t>el</a:t>
+            </a:r>
+            <a:r>
+              <a:rPr lang="en-US" sz="1500" b="0" i="0" u="none" strike="noStrike" cap="none" dirty="0">
+                <a:solidFill>
+                  <a:srgbClr val="334155"/>
+                </a:solidFill>
+                <a:latin typeface="Lato"/>
+                <a:ea typeface="Lato"/>
+                <a:cs typeface="Lato"/>
+                <a:sym typeface="Lato"/>
+              </a:rPr>
+              <a:t> </a:t>
+            </a:r>
+            <a:r>
+              <a:rPr lang="en-US" sz="1500" b="0" i="0" u="none" strike="noStrike" cap="none" dirty="0" err="1">
+                <a:solidFill>
+                  <a:srgbClr val="334155"/>
+                </a:solidFill>
+                <a:latin typeface="Lato"/>
+                <a:ea typeface="Lato"/>
+                <a:cs typeface="Lato"/>
+                <a:sym typeface="Lato"/>
+              </a:rPr>
+              <a:t>perfil</a:t>
+            </a:r>
+            <a:r>
+              <a:rPr lang="en-US" sz="1500" b="0" i="0" u="none" strike="noStrike" cap="none" dirty="0">
+                <a:solidFill>
+                  <a:srgbClr val="334155"/>
+                </a:solidFill>
+                <a:latin typeface="Lato"/>
+                <a:ea typeface="Lato"/>
+                <a:cs typeface="Lato"/>
+                <a:sym typeface="Lato"/>
+              </a:rPr>
+              <a:t> Familiar.</a:t>
+            </a:r>
+            <a:endParaRPr dirty="0"/>
           </a:p>
         </p:txBody>
       </p:sp>
@@ -21009,7 +21117,7 @@
               <a:buNone/>
             </a:pPr>
             <a:r>
-              <a:rPr lang="en-US" sz="1500" b="0" i="0" u="none" strike="noStrike" cap="none">
+              <a:rPr lang="en-US" sz="1500" b="0" i="0" u="none" strike="noStrike" cap="none" dirty="0" err="1">
                 <a:solidFill>
                   <a:srgbClr val="334155"/>
                 </a:solidFill>
@@ -21018,9 +21126,93 @@
                 <a:cs typeface="Lato"/>
                 <a:sym typeface="Lato"/>
               </a:rPr>
-              <a:t>Ejecutar un pipeline completo de marketing para perfilar clientes retail.</a:t>
-            </a:r>
-            <a:endParaRPr/>
+              <a:t>Ejecutar</a:t>
+            </a:r>
+            <a:r>
+              <a:rPr lang="en-US" sz="1500" b="0" i="0" u="none" strike="noStrike" cap="none" dirty="0">
+                <a:solidFill>
+                  <a:srgbClr val="334155"/>
+                </a:solidFill>
+                <a:latin typeface="Lato"/>
+                <a:ea typeface="Lato"/>
+                <a:cs typeface="Lato"/>
+                <a:sym typeface="Lato"/>
+              </a:rPr>
+              <a:t> un pipeline </a:t>
+            </a:r>
+            <a:r>
+              <a:rPr lang="en-US" sz="1500" b="0" i="0" u="none" strike="noStrike" cap="none" dirty="0" err="1">
+                <a:solidFill>
+                  <a:srgbClr val="334155"/>
+                </a:solidFill>
+                <a:latin typeface="Lato"/>
+                <a:ea typeface="Lato"/>
+                <a:cs typeface="Lato"/>
+                <a:sym typeface="Lato"/>
+              </a:rPr>
+              <a:t>completo</a:t>
+            </a:r>
+            <a:r>
+              <a:rPr lang="en-US" sz="1500" b="0" i="0" u="none" strike="noStrike" cap="none" dirty="0">
+                <a:solidFill>
+                  <a:srgbClr val="334155"/>
+                </a:solidFill>
+                <a:latin typeface="Lato"/>
+                <a:ea typeface="Lato"/>
+                <a:cs typeface="Lato"/>
+                <a:sym typeface="Lato"/>
+              </a:rPr>
+              <a:t> de marketing para </a:t>
+            </a:r>
+            <a:r>
+              <a:rPr lang="en-US" sz="1500" b="0" i="0" u="none" strike="noStrike" cap="none" dirty="0" err="1">
+                <a:solidFill>
+                  <a:srgbClr val="334155"/>
+                </a:solidFill>
+                <a:latin typeface="Lato"/>
+                <a:ea typeface="Lato"/>
+                <a:cs typeface="Lato"/>
+                <a:sym typeface="Lato"/>
+              </a:rPr>
+              <a:t>perfilar</a:t>
+            </a:r>
+            <a:r>
+              <a:rPr lang="en-US" sz="1500" b="0" i="0" u="none" strike="noStrike" cap="none" dirty="0">
+                <a:solidFill>
+                  <a:srgbClr val="334155"/>
+                </a:solidFill>
+                <a:latin typeface="Lato"/>
+                <a:ea typeface="Lato"/>
+                <a:cs typeface="Lato"/>
+                <a:sym typeface="Lato"/>
+              </a:rPr>
+              <a:t> </a:t>
+            </a:r>
+            <a:r>
+              <a:rPr lang="en-US" sz="1500" b="0" i="0" u="none" strike="noStrike" cap="none" dirty="0" err="1">
+                <a:solidFill>
+                  <a:srgbClr val="334155"/>
+                </a:solidFill>
+                <a:latin typeface="Lato"/>
+                <a:ea typeface="Lato"/>
+                <a:cs typeface="Lato"/>
+                <a:sym typeface="Lato"/>
+              </a:rPr>
+              <a:t>clientes</a:t>
+            </a:r>
+            <a:r>
+              <a:rPr lang="en-US" sz="1500" b="0" i="0" u="none" strike="noStrike" cap="none" dirty="0">
+                <a:solidFill>
+                  <a:srgbClr val="334155"/>
+                </a:solidFill>
+                <a:latin typeface="Lato"/>
+                <a:ea typeface="Lato"/>
+                <a:cs typeface="Lato"/>
+                <a:sym typeface="Lato"/>
+              </a:rPr>
+              <a:t> retail.</a:t>
+            </a:r>
+            <a:endParaRPr dirty="0"/>
           </a:p>
         </p:txBody>
       </p:sp>
@@ -21328,7 +21520,7 @@
               <a:buNone/>
             </a:pPr>
             <a:r>
-              <a:rPr lang="en-US" sz="3900" b="1" i="0" u="none" strike="noStrike" cap="none">
+              <a:rPr lang="en-US" sz="3900" b="1" i="0" u="none" strike="noStrike" cap="none" dirty="0">
                 <a:solidFill>
                   <a:srgbClr val="0F172A"/>
                 </a:solidFill>
@@ -21337,9 +21529,297 @@
                 <a:cs typeface="Poppins"/>
                 <a:sym typeface="Poppins"/>
               </a:rPr>
-              <a:t>¿Qué significa que un modelo clasifique bien en promedio pero mal en una clase específica?</a:t>
-            </a:r>
-            <a:endParaRPr/>
+              <a:t>¿</a:t>
+            </a:r>
+            <a:r>
+              <a:rPr lang="en-US" sz="3900" b="1" i="0" u="none" strike="noStrike" cap="none" dirty="0" err="1">
+                <a:solidFill>
+                  <a:srgbClr val="0F172A"/>
+                </a:solidFill>
+                <a:latin typeface="Poppins"/>
+                <a:ea typeface="Poppins"/>
+                <a:cs typeface="Poppins"/>
+                <a:sym typeface="Poppins"/>
+              </a:rPr>
+              <a:t>Qué</a:t>
+            </a:r>
+            <a:r>
+              <a:rPr lang="en-US" sz="3900" b="1" i="0" u="none" strike="noStrike" cap="none" dirty="0">
+                <a:solidFill>
+                  <a:srgbClr val="0F172A"/>
+                </a:solidFill>
+                <a:latin typeface="Poppins"/>
+                <a:ea typeface="Poppins"/>
+                <a:cs typeface="Poppins"/>
+                <a:sym typeface="Poppins"/>
+              </a:rPr>
+              <a:t> </a:t>
+            </a:r>
+            <a:r>
+              <a:rPr lang="en-US" sz="3900" b="1" i="0" u="none" strike="noStrike" cap="none" dirty="0" err="1">
+                <a:solidFill>
+                  <a:srgbClr val="0F172A"/>
+                </a:solidFill>
+                <a:latin typeface="Poppins"/>
+                <a:ea typeface="Poppins"/>
+                <a:cs typeface="Poppins"/>
+                <a:sym typeface="Poppins"/>
+              </a:rPr>
+              <a:t>significa</a:t>
+            </a:r>
+            <a:r>
+              <a:rPr lang="en-US" sz="3900" b="1" i="0" u="none" strike="noStrike" cap="none" dirty="0">
+                <a:solidFill>
+                  <a:srgbClr val="0F172A"/>
+                </a:solidFill>
+                <a:latin typeface="Poppins"/>
+                <a:ea typeface="Poppins"/>
+                <a:cs typeface="Poppins"/>
+                <a:sym typeface="Poppins"/>
+              </a:rPr>
+              <a:t> </a:t>
+            </a:r>
+            <a:r>
+              <a:rPr lang="en-US" sz="3900" b="1" i="0" u="none" strike="noStrike" cap="none" dirty="0" err="1">
+                <a:solidFill>
+                  <a:srgbClr val="0F172A"/>
+                </a:solidFill>
+                <a:latin typeface="Poppins"/>
+                <a:ea typeface="Poppins"/>
+                <a:cs typeface="Poppins"/>
+                <a:sym typeface="Poppins"/>
+              </a:rPr>
+              <a:t>que</a:t>
+            </a:r>
+            <a:r>
+              <a:rPr lang="en-US" sz="3900" b="1" i="0" u="none" strike="noStrike" cap="none" dirty="0">
+                <a:solidFill>
+                  <a:srgbClr val="0F172A"/>
+                </a:solidFill>
+                <a:latin typeface="Poppins"/>
+                <a:ea typeface="Poppins"/>
+                <a:cs typeface="Poppins"/>
+                <a:sym typeface="Poppins"/>
+              </a:rPr>
+              <a:t> un </a:t>
+            </a:r>
+            <a:r>
+              <a:rPr lang="en-US" sz="3900" b="1" i="0" u="none" strike="noStrike" cap="none" dirty="0" err="1">
+                <a:solidFill>
+                  <a:srgbClr val="0F172A"/>
+                </a:solidFill>
+                <a:latin typeface="Poppins"/>
+                <a:ea typeface="Poppins"/>
+                <a:cs typeface="Poppins"/>
+                <a:sym typeface="Poppins"/>
+              </a:rPr>
+              <a:t>modelo</a:t>
+            </a:r>
+            <a:r>
+              <a:rPr lang="en-US" sz="3900" b="1" i="0" u="none" strike="noStrike" cap="none" dirty="0">
+                <a:solidFill>
+                  <a:srgbClr val="0F172A"/>
+                </a:solidFill>
+                <a:latin typeface="Poppins"/>
+                <a:ea typeface="Poppins"/>
+                <a:cs typeface="Poppins"/>
+                <a:sym typeface="Poppins"/>
+              </a:rPr>
+              <a:t> </a:t>
+            </a:r>
+            <a:r>
+              <a:rPr lang="en-US" sz="3900" b="1" i="0" u="none" strike="noStrike" cap="none" dirty="0" err="1">
+                <a:solidFill>
+                  <a:srgbClr val="0F172A"/>
+                </a:solidFill>
+                <a:latin typeface="Poppins"/>
+                <a:ea typeface="Poppins"/>
+                <a:cs typeface="Poppins"/>
+                <a:sym typeface="Poppins"/>
+              </a:rPr>
+              <a:t>clasifique</a:t>
+            </a:r>
+            <a:r>
+              <a:rPr lang="en-US" sz="3900" b="1" i="0" u="none" strike="noStrike" cap="none" dirty="0">
+                <a:solidFill>
+                  <a:srgbClr val="0F172A"/>
+                </a:solidFill>
+                <a:latin typeface="Poppins"/>
+                <a:ea typeface="Poppins"/>
+                <a:cs typeface="Poppins"/>
+                <a:sym typeface="Poppins"/>
+              </a:rPr>
+              <a:t> bien </a:t>
+            </a:r>
+            <a:r>
+              <a:rPr lang="en-US" sz="3900" b="1" i="0" u="none" strike="noStrike" cap="none" dirty="0" err="1">
+                <a:solidFill>
+                  <a:srgbClr val="0F172A"/>
+                </a:solidFill>
+                <a:latin typeface="Poppins"/>
+                <a:ea typeface="Poppins"/>
+                <a:cs typeface="Poppins"/>
+                <a:sym typeface="Poppins"/>
+              </a:rPr>
+              <a:t>en</a:t>
+            </a:r>
+            <a:r>
+              <a:rPr lang="en-US" sz="3900" b="1" i="0" u="none" strike="noStrike" cap="none" dirty="0">
+                <a:solidFill>
+                  <a:srgbClr val="0F172A"/>
+                </a:solidFill>
+                <a:latin typeface="Poppins"/>
+                <a:ea typeface="Poppins"/>
+                <a:cs typeface="Poppins"/>
+                <a:sym typeface="Poppins"/>
+              </a:rPr>
+              <a:t> </a:t>
+            </a:r>
+            <a:r>
+              <a:rPr lang="en-US" sz="3900" b="1" i="0" u="none" strike="noStrike" cap="none" dirty="0" err="1">
+                <a:solidFill>
+                  <a:srgbClr val="0F172A"/>
+                </a:solidFill>
+                <a:latin typeface="Poppins"/>
+                <a:ea typeface="Poppins"/>
+                <a:cs typeface="Poppins"/>
+                <a:sym typeface="Poppins"/>
+              </a:rPr>
+              <a:t>promedio</a:t>
+            </a:r>
+            <a:r>
+              <a:rPr lang="en-US" sz="3900" b="1" i="0" u="none" strike="noStrike" cap="none" dirty="0">
+                <a:solidFill>
+                  <a:srgbClr val="0F172A"/>
+                </a:solidFill>
+                <a:latin typeface="Poppins"/>
+                <a:ea typeface="Poppins"/>
+                <a:cs typeface="Poppins"/>
+                <a:sym typeface="Poppins"/>
+              </a:rPr>
+              <a:t> </a:t>
+            </a:r>
+            <a:r>
+              <a:rPr lang="en-US" sz="3900" b="1" i="0" u="none" strike="noStrike" cap="none" dirty="0" err="1">
+                <a:solidFill>
+                  <a:srgbClr val="0F172A"/>
+                </a:solidFill>
+                <a:latin typeface="Poppins"/>
+                <a:ea typeface="Poppins"/>
+                <a:cs typeface="Poppins"/>
+                <a:sym typeface="Poppins"/>
+              </a:rPr>
+              <a:t>pero</a:t>
+            </a:r>
+            <a:r>
+              <a:rPr lang="en-US" sz="3900" b="1" i="0" u="none" strike="noStrike" cap="none" dirty="0">
+                <a:solidFill>
+                  <a:srgbClr val="0F172A"/>
+                </a:solidFill>
+                <a:latin typeface="Poppins"/>
+                <a:ea typeface="Poppins"/>
+                <a:cs typeface="Poppins"/>
+                <a:sym typeface="Poppins"/>
+              </a:rPr>
+              <a:t> mal </a:t>
+            </a:r>
+            <a:r>
+              <a:rPr lang="en-US" sz="3900" b="1" i="0" u="none" strike="noStrike" cap="none" dirty="0" err="1">
+                <a:solidFill>
+                  <a:srgbClr val="0F172A"/>
+                </a:solidFill>
+                <a:latin typeface="Poppins"/>
+                <a:ea typeface="Poppins"/>
+                <a:cs typeface="Poppins"/>
+                <a:sym typeface="Poppins"/>
+              </a:rPr>
+              <a:t>en</a:t>
+            </a:r>
+            <a:r>
+              <a:rPr lang="en-US" sz="3900" b="1" i="0" u="none" strike="noStrike" cap="none" dirty="0">
+                <a:solidFill>
+                  <a:srgbClr val="0F172A"/>
+                </a:solidFill>
+                <a:latin typeface="Poppins"/>
+                <a:ea typeface="Poppins"/>
+                <a:cs typeface="Poppins"/>
+                <a:sym typeface="Poppins"/>
+              </a:rPr>
+              <a:t> </a:t>
+            </a:r>
+            <a:r>
+              <a:rPr lang="en-US" sz="3900" b="1" i="0" u="none" strike="noStrike" cap="none" dirty="0" err="1">
+                <a:solidFill>
+                  <a:srgbClr val="0F172A"/>
+                </a:solidFill>
+                <a:latin typeface="Poppins"/>
+                <a:ea typeface="Poppins"/>
+                <a:cs typeface="Poppins"/>
+                <a:sym typeface="Poppins"/>
+              </a:rPr>
+              <a:t>una</a:t>
+            </a:r>
+            <a:r>
+              <a:rPr lang="en-US" sz="3900" b="1" i="0" u="none" strike="noStrike" cap="none" dirty="0">
+                <a:solidFill>
+                  <a:srgbClr val="0F172A"/>
+                </a:solidFill>
+                <a:latin typeface="Poppins"/>
+                <a:ea typeface="Poppins"/>
+                <a:cs typeface="Poppins"/>
+                <a:sym typeface="Poppins"/>
+              </a:rPr>
+              <a:t> </a:t>
+            </a:r>
+            <a:r>
+              <a:rPr lang="en-US" sz="3900" b="1" i="0" u="none" strike="noStrike" cap="none" dirty="0" err="1">
+                <a:solidFill>
+                  <a:srgbClr val="0F172A"/>
+                </a:solidFill>
+                <a:latin typeface="Poppins"/>
+                <a:ea typeface="Poppins"/>
+                <a:cs typeface="Poppins"/>
+                <a:sym typeface="Poppins"/>
+              </a:rPr>
+              <a:t>clase</a:t>
+            </a:r>
+            <a:r>
+              <a:rPr lang="en-US" sz="3900" b="1" i="0" u="none" strike="noStrike" cap="none" dirty="0">
+                <a:solidFill>
+                  <a:srgbClr val="0F172A"/>
+                </a:solidFill>
+                <a:latin typeface="Poppins"/>
+                <a:ea typeface="Poppins"/>
+                <a:cs typeface="Poppins"/>
+                <a:sym typeface="Poppins"/>
+              </a:rPr>
+              <a:t> </a:t>
+            </a:r>
+            <a:r>
+              <a:rPr lang="en-US" sz="3900" b="1" i="0" u="none" strike="noStrike" cap="none" dirty="0" err="1">
+                <a:solidFill>
+                  <a:srgbClr val="0F172A"/>
+                </a:solidFill>
+                <a:latin typeface="Poppins"/>
+                <a:ea typeface="Poppins"/>
+                <a:cs typeface="Poppins"/>
+                <a:sym typeface="Poppins"/>
+              </a:rPr>
+              <a:t>específica</a:t>
+            </a:r>
+            <a:r>
+              <a:rPr lang="en-US" sz="3900" b="1" i="0" u="none" strike="noStrike" cap="none" dirty="0">
+                <a:solidFill>
+                  <a:srgbClr val="0F172A"/>
+                </a:solidFill>
+                <a:latin typeface="Poppins"/>
+                <a:ea typeface="Poppins"/>
+                <a:cs typeface="Poppins"/>
+                <a:sym typeface="Poppins"/>
+              </a:rPr>
+              <a:t>?</a:t>
+            </a:r>
+            <a:endParaRPr dirty="0"/>
           </a:p>
         </p:txBody>
       </p:sp>
@@ -21779,7 +22259,7 @@
               <a:buNone/>
             </a:pPr>
             <a:r>
-              <a:rPr lang="en-US" sz="1500" b="1" i="0" u="none" strike="noStrike" cap="none">
+              <a:rPr lang="en-US" sz="1500" b="1" i="0" u="none" strike="noStrike" cap="none" dirty="0">
                 <a:solidFill>
                   <a:srgbClr val="0F172A"/>
                 </a:solidFill>
@@ -21791,7 +22271,7 @@
               <a:t>|score| alto:</a:t>
             </a:r>
             <a:r>
-              <a:rPr lang="en-US" sz="1500" b="0" i="0" u="none" strike="noStrike" cap="none">
+              <a:rPr lang="en-US" sz="1500" b="0" i="0" u="none" strike="noStrike" cap="none" dirty="0">
                 <a:solidFill>
                   <a:srgbClr val="334155"/>
                 </a:solidFill>
@@ -21800,33 +22280,81 @@
                 <a:cs typeface="Lato"/>
                 <a:sym typeface="Lato"/>
               </a:rPr>
-              <a:t> Punto alejado de la frontera → </a:t>
-            </a:r>
-            <a:r>
-              <a:rPr lang="en-US" sz="1500" b="1" i="0" u="none" strike="noStrike" cap="none">
-                <a:solidFill>
-                  <a:srgbClr val="0F172A"/>
+              <a:t> Punto </a:t>
+            </a:r>
+            <a:r>
+              <a:rPr lang="en-US" sz="1500" b="0" i="0" u="none" strike="noStrike" cap="none" dirty="0" err="1">
+                <a:solidFill>
+                  <a:srgbClr val="334155"/>
                 </a:solidFill>
                 <a:latin typeface="Lato"/>
                 <a:ea typeface="Lato"/>
                 <a:cs typeface="Lato"/>
                 <a:sym typeface="Lato"/>
               </a:rPr>
-              <a:t>Alta </a:t>
-            </a:r>
-            <a:r>
-              <a:rPr lang="en-US" sz="1500" b="1">
-                <a:solidFill>
-                  <a:srgbClr val="0F172A"/>
+              <a:t>alejado</a:t>
+            </a:r>
+            <a:r>
+              <a:rPr lang="en-US" sz="1500" b="0" i="0" u="none" strike="noStrike" cap="none" dirty="0">
+                <a:solidFill>
+                  <a:srgbClr val="334155"/>
                 </a:solidFill>
                 <a:latin typeface="Lato"/>
                 <a:ea typeface="Lato"/>
                 <a:cs typeface="Lato"/>
                 <a:sym typeface="Lato"/>
               </a:rPr>
+              <a:t> de la </a:t>
+            </a:r>
+            <a:r>
+              <a:rPr lang="en-US" sz="1500" b="0" i="0" u="none" strike="noStrike" cap="none" dirty="0" err="1">
+                <a:solidFill>
+                  <a:srgbClr val="334155"/>
+                </a:solidFill>
+                <a:latin typeface="Lato"/>
+                <a:ea typeface="Lato"/>
+                <a:cs typeface="Lato"/>
+                <a:sym typeface="Lato"/>
+              </a:rPr>
+              <a:t>frontera</a:t>
+            </a:r>
+            <a:r>
+              <a:rPr lang="en-US" sz="1500" b="0" i="0" u="none" strike="noStrike" cap="none" dirty="0">
+                <a:solidFill>
+                  <a:srgbClr val="334155"/>
+                </a:solidFill>
+                <a:latin typeface="Lato"/>
+                <a:ea typeface="Lato"/>
+                <a:cs typeface="Lato"/>
+                <a:sym typeface="Lato"/>
+              </a:rPr>
+              <a:t> → </a:t>
+            </a:r>
+            <a:r>
+              <a:rPr lang="en-US" sz="1500" b="1" i="0" u="none" strike="noStrike" cap="none" dirty="0">
+                <a:solidFill>
+                  <a:srgbClr val="0F172A"/>
+                </a:solidFill>
+                <a:latin typeface="Lato"/>
+                <a:ea typeface="Lato"/>
+                <a:cs typeface="Lato"/>
+                <a:sym typeface="Lato"/>
+              </a:rPr>
+              <a:t>Alta </a:t>
+            </a:r>
+            <a:r>
+              <a:rPr lang="en-US" sz="1500" b="1" dirty="0">
+                <a:solidFill>
+                  <a:srgbClr val="0F172A"/>
+                </a:solidFill>
+                <a:latin typeface="Lato"/>
+                <a:ea typeface="Lato"/>
+                <a:cs typeface="Lato"/>
+                <a:sym typeface="Lato"/>
+              </a:rPr>
               <a:t>confianza</a:t>
             </a:r>
-            <a:endParaRPr/>
+            <a:endParaRPr dirty="0"/>
           </a:p>
         </p:txBody>
       </p:sp>
@@ -22144,7 +22672,7 @@
               <a:buNone/>
             </a:pPr>
             <a:r>
-              <a:rPr lang="en-US" sz="1500" b="0" i="0" u="none" strike="noStrike" cap="none">
+              <a:rPr lang="en-US" sz="1500" b="0" i="0" u="none" strike="noStrike" cap="none" dirty="0">
                 <a:solidFill>
                   <a:srgbClr val="334155"/>
                 </a:solidFill>
@@ -22153,22 +22681,22 @@
                 <a:cs typeface="Lato"/>
                 <a:sym typeface="Lato"/>
               </a:rPr>
-              <a:t>En problemas binarios, mapeamos el score a una probabilidad posterior mediante la </a:t>
-            </a:r>
-            <a:r>
-              <a:rPr lang="en-US" sz="1500" b="1" i="0" u="none" strike="noStrike" cap="none">
-                <a:solidFill>
-                  <a:srgbClr val="0F172A"/>
+              <a:t>En </a:t>
+            </a:r>
+            <a:r>
+              <a:rPr lang="en-US" sz="1500" b="0" i="0" u="none" strike="noStrike" cap="none" dirty="0" err="1">
+                <a:solidFill>
+                  <a:srgbClr val="334155"/>
                 </a:solidFill>
                 <a:latin typeface="Lato"/>
                 <a:ea typeface="Lato"/>
                 <a:cs typeface="Lato"/>
                 <a:sym typeface="Lato"/>
               </a:rPr>
-              <a:t>función sigmoide</a:t>
-            </a:r>
-            <a:r>
-              <a:rPr lang="en-US" sz="1500" b="0" i="0" u="none" strike="noStrike" cap="none">
+              <a:t>problemas</a:t>
+            </a:r>
+            <a:r>
+              <a:rPr lang="en-US" sz="1500" b="0" i="0" u="none" strike="noStrike" cap="none" dirty="0">
                 <a:solidFill>
                   <a:srgbClr val="334155"/>
                 </a:solidFill>
@@ -22177,9 +22705,201 @@
                 <a:cs typeface="Lato"/>
                 <a:sym typeface="Lato"/>
               </a:rPr>
+              <a:t> </a:t>
+            </a:r>
+            <a:r>
+              <a:rPr lang="en-US" sz="1500" b="0" i="0" u="none" strike="noStrike" cap="none" dirty="0" err="1">
+                <a:solidFill>
+                  <a:srgbClr val="334155"/>
+                </a:solidFill>
+                <a:latin typeface="Lato"/>
+                <a:ea typeface="Lato"/>
+                <a:cs typeface="Lato"/>
+                <a:sym typeface="Lato"/>
+              </a:rPr>
+              <a:t>binarios</a:t>
+            </a:r>
+            <a:r>
+              <a:rPr lang="en-US" sz="1500" b="0" i="0" u="none" strike="noStrike" cap="none" dirty="0">
+                <a:solidFill>
+                  <a:srgbClr val="334155"/>
+                </a:solidFill>
+                <a:latin typeface="Lato"/>
+                <a:ea typeface="Lato"/>
+                <a:cs typeface="Lato"/>
+                <a:sym typeface="Lato"/>
+              </a:rPr>
+              <a:t>, </a:t>
+            </a:r>
+            <a:r>
+              <a:rPr lang="en-US" sz="1500" b="0" i="0" u="none" strike="noStrike" cap="none" dirty="0" err="1">
+                <a:solidFill>
+                  <a:srgbClr val="334155"/>
+                </a:solidFill>
+                <a:latin typeface="Lato"/>
+                <a:ea typeface="Lato"/>
+                <a:cs typeface="Lato"/>
+                <a:sym typeface="Lato"/>
+              </a:rPr>
+              <a:t>mapeamos</a:t>
+            </a:r>
+            <a:r>
+              <a:rPr lang="en-US" sz="1500" b="0" i="0" u="none" strike="noStrike" cap="none" dirty="0">
+                <a:solidFill>
+                  <a:srgbClr val="334155"/>
+                </a:solidFill>
+                <a:latin typeface="Lato"/>
+                <a:ea typeface="Lato"/>
+                <a:cs typeface="Lato"/>
+                <a:sym typeface="Lato"/>
+              </a:rPr>
+              <a:t> </a:t>
+            </a:r>
+            <a:r>
+              <a:rPr lang="en-US" sz="1500" b="0" i="0" u="none" strike="noStrike" cap="none" dirty="0" err="1">
+                <a:solidFill>
+                  <a:srgbClr val="334155"/>
+                </a:solidFill>
+                <a:latin typeface="Lato"/>
+                <a:ea typeface="Lato"/>
+                <a:cs typeface="Lato"/>
+                <a:sym typeface="Lato"/>
+              </a:rPr>
+              <a:t>el</a:t>
+            </a:r>
+            <a:r>
+              <a:rPr lang="en-US" sz="1500" b="0" i="0" u="none" strike="noStrike" cap="none" dirty="0">
+                <a:solidFill>
+                  <a:srgbClr val="334155"/>
+                </a:solidFill>
+                <a:latin typeface="Lato"/>
+                <a:ea typeface="Lato"/>
+                <a:cs typeface="Lato"/>
+                <a:sym typeface="Lato"/>
+              </a:rPr>
+              <a:t> score a </a:t>
+            </a:r>
+            <a:r>
+              <a:rPr lang="en-US" sz="1500" b="0" i="0" u="none" strike="noStrike" cap="none" dirty="0" err="1">
+                <a:solidFill>
+                  <a:srgbClr val="334155"/>
+                </a:solidFill>
+                <a:latin typeface="Lato"/>
+                <a:ea typeface="Lato"/>
+                <a:cs typeface="Lato"/>
+                <a:sym typeface="Lato"/>
+              </a:rPr>
+              <a:t>una</a:t>
+            </a:r>
+            <a:r>
+              <a:rPr lang="en-US" sz="1500" b="0" i="0" u="none" strike="noStrike" cap="none" dirty="0">
+                <a:solidFill>
+                  <a:srgbClr val="334155"/>
+                </a:solidFill>
+                <a:latin typeface="Lato"/>
+                <a:ea typeface="Lato"/>
+                <a:cs typeface="Lato"/>
+                <a:sym typeface="Lato"/>
+              </a:rPr>
+              <a:t> </a:t>
+            </a:r>
+            <a:r>
+              <a:rPr lang="en-US" sz="1500" b="0" i="0" u="none" strike="noStrike" cap="none" dirty="0" err="1">
+                <a:solidFill>
+                  <a:srgbClr val="334155"/>
+                </a:solidFill>
+                <a:latin typeface="Lato"/>
+                <a:ea typeface="Lato"/>
+                <a:cs typeface="Lato"/>
+                <a:sym typeface="Lato"/>
+              </a:rPr>
+              <a:t>probabilidad</a:t>
+            </a:r>
+            <a:r>
+              <a:rPr lang="en-US" sz="1500" b="0" i="0" u="none" strike="noStrike" cap="none" dirty="0">
+                <a:solidFill>
+                  <a:srgbClr val="334155"/>
+                </a:solidFill>
+                <a:latin typeface="Lato"/>
+                <a:ea typeface="Lato"/>
+                <a:cs typeface="Lato"/>
+                <a:sym typeface="Lato"/>
+              </a:rPr>
+              <a:t> posterior </a:t>
+            </a:r>
+            <a:r>
+              <a:rPr lang="en-US" sz="1500" b="0" i="0" u="none" strike="noStrike" cap="none" dirty="0" err="1">
+                <a:solidFill>
+                  <a:srgbClr val="334155"/>
+                </a:solidFill>
+                <a:latin typeface="Lato"/>
+                <a:ea typeface="Lato"/>
+                <a:cs typeface="Lato"/>
+                <a:sym typeface="Lato"/>
+              </a:rPr>
+              <a:t>mediante</a:t>
+            </a:r>
+            <a:r>
+              <a:rPr lang="en-US" sz="1500" b="0" i="0" u="none" strike="noStrike" cap="none" dirty="0">
+                <a:solidFill>
+                  <a:srgbClr val="334155"/>
+                </a:solidFill>
+                <a:latin typeface="Lato"/>
+                <a:ea typeface="Lato"/>
+                <a:cs typeface="Lato"/>
+                <a:sym typeface="Lato"/>
+              </a:rPr>
+              <a:t> la </a:t>
+            </a:r>
+            <a:r>
+              <a:rPr lang="en-US" sz="1500" b="1" i="0" u="none" strike="noStrike" cap="none" dirty="0" err="1">
+                <a:solidFill>
+                  <a:srgbClr val="0F172A"/>
+                </a:solidFill>
+                <a:latin typeface="Lato"/>
+                <a:ea typeface="Lato"/>
+                <a:cs typeface="Lato"/>
+                <a:sym typeface="Lato"/>
+              </a:rPr>
+              <a:t>función</a:t>
+            </a:r>
+            <a:r>
+              <a:rPr lang="en-US" sz="1500" b="1" i="0" u="none" strike="noStrike" cap="none" dirty="0">
+                <a:solidFill>
+                  <a:srgbClr val="0F172A"/>
+                </a:solidFill>
+                <a:latin typeface="Lato"/>
+                <a:ea typeface="Lato"/>
+                <a:cs typeface="Lato"/>
+                <a:sym typeface="Lato"/>
+              </a:rPr>
+              <a:t> </a:t>
+            </a:r>
+            <a:r>
+              <a:rPr lang="en-US" sz="1500" b="1" i="0" u="none" strike="noStrike" cap="none" dirty="0" err="1">
+                <a:solidFill>
+                  <a:srgbClr val="0F172A"/>
+                </a:solidFill>
+                <a:latin typeface="Lato"/>
+                <a:ea typeface="Lato"/>
+                <a:cs typeface="Lato"/>
+                <a:sym typeface="Lato"/>
+              </a:rPr>
+              <a:t>sigmoide</a:t>
+            </a:r>
+            <a:r>
+              <a:rPr lang="en-US" sz="1500" b="0" i="0" u="none" strike="noStrike" cap="none" dirty="0">
+                <a:solidFill>
+                  <a:srgbClr val="334155"/>
+                </a:solidFill>
+                <a:latin typeface="Lato"/>
+                <a:ea typeface="Lato"/>
+                <a:cs typeface="Lato"/>
+                <a:sym typeface="Lato"/>
+              </a:rPr>
               <a:t>:</a:t>
             </a:r>
-            <a:endParaRPr/>
+            <a:endParaRPr dirty="0"/>
           </a:p>
         </p:txBody>
       </p:sp>
@@ -22221,7 +22941,7 @@
               <a:buNone/>
             </a:pPr>
             <a:r>
-              <a:rPr lang="en-US" sz="1500" b="0" i="0" u="none" strike="noStrike" cap="none">
+              <a:rPr lang="en-US" sz="1500" b="0" i="0" u="none" strike="noStrike" cap="none" dirty="0">
                 <a:solidFill>
                   <a:srgbClr val="334155"/>
                 </a:solidFill>
@@ -22230,9 +22950,177 @@
                 <a:cs typeface="Lato"/>
                 <a:sym typeface="Lato"/>
               </a:rPr>
-              <a:t>Un score de 0 resulta en P=0.5, el punto de máxima incertidumbre para el modelo.</a:t>
-            </a:r>
-            <a:endParaRPr/>
+              <a:t>Un score de 0 </a:t>
+            </a:r>
+            <a:r>
+              <a:rPr lang="en-US" sz="1500" b="0" i="0" u="none" strike="noStrike" cap="none" dirty="0" err="1">
+                <a:solidFill>
+                  <a:srgbClr val="334155"/>
+                </a:solidFill>
+                <a:latin typeface="Lato"/>
+                <a:ea typeface="Lato"/>
+                <a:cs typeface="Lato"/>
+                <a:sym typeface="Lato"/>
+              </a:rPr>
+              <a:t>resulta</a:t>
+            </a:r>
+            <a:r>
+              <a:rPr lang="en-US" sz="1500" b="0" i="0" u="none" strike="noStrike" cap="none" dirty="0">
+                <a:solidFill>
+                  <a:srgbClr val="334155"/>
+                </a:solidFill>
+                <a:latin typeface="Lato"/>
+                <a:ea typeface="Lato"/>
+                <a:cs typeface="Lato"/>
+                <a:sym typeface="Lato"/>
+              </a:rPr>
+              <a:t> </a:t>
+            </a:r>
+            <a:r>
+              <a:rPr lang="en-US" sz="1500" b="0" i="0" u="none" strike="noStrike" cap="none" dirty="0" err="1">
+                <a:solidFill>
+                  <a:srgbClr val="334155"/>
+                </a:solidFill>
+                <a:latin typeface="Lato"/>
+                <a:ea typeface="Lato"/>
+                <a:cs typeface="Lato"/>
+                <a:sym typeface="Lato"/>
+              </a:rPr>
+              <a:t>en</a:t>
+            </a:r>
+            <a:r>
+              <a:rPr lang="en-US" sz="1500" b="0" i="0" u="none" strike="noStrike" cap="none" dirty="0">
+                <a:solidFill>
+                  <a:srgbClr val="334155"/>
+                </a:solidFill>
+                <a:latin typeface="Lato"/>
+                <a:ea typeface="Lato"/>
+                <a:cs typeface="Lato"/>
+                <a:sym typeface="Lato"/>
+              </a:rPr>
+              <a:t> P=0.5, </a:t>
+            </a:r>
+            <a:r>
+              <a:rPr lang="en-US" sz="1500" b="0" i="0" u="none" strike="noStrike" cap="none" dirty="0" err="1">
+                <a:solidFill>
+                  <a:srgbClr val="334155"/>
+                </a:solidFill>
+                <a:latin typeface="Lato"/>
+                <a:ea typeface="Lato"/>
+                <a:cs typeface="Lato"/>
+                <a:sym typeface="Lato"/>
+              </a:rPr>
+              <a:t>el</a:t>
+            </a:r>
+            <a:r>
+              <a:rPr lang="en-US" sz="1500" b="0" i="0" u="none" strike="noStrike" cap="none" dirty="0">
+                <a:solidFill>
+                  <a:srgbClr val="334155"/>
+                </a:solidFill>
+                <a:latin typeface="Lato"/>
+                <a:ea typeface="Lato"/>
+                <a:cs typeface="Lato"/>
+                <a:sym typeface="Lato"/>
+              </a:rPr>
+              <a:t> punto de </a:t>
+            </a:r>
+            <a:r>
+              <a:rPr lang="en-US" sz="1500" b="0" i="0" u="none" strike="noStrike" cap="none" dirty="0" err="1">
+                <a:solidFill>
+                  <a:srgbClr val="334155"/>
+                </a:solidFill>
+                <a:latin typeface="Lato"/>
+                <a:ea typeface="Lato"/>
+                <a:cs typeface="Lato"/>
+                <a:sym typeface="Lato"/>
+              </a:rPr>
+              <a:t>máxima</a:t>
+            </a:r>
+            <a:r>
+              <a:rPr lang="en-US" sz="1500" b="0" i="0" u="none" strike="noStrike" cap="none" dirty="0">
+                <a:solidFill>
+                  <a:srgbClr val="334155"/>
+                </a:solidFill>
+                <a:latin typeface="Lato"/>
+                <a:ea typeface="Lato"/>
+                <a:cs typeface="Lato"/>
+                <a:sym typeface="Lato"/>
+              </a:rPr>
+              <a:t> </a:t>
+            </a:r>
+            <a:r>
+              <a:rPr lang="en-US" sz="1500" b="0" i="0" u="none" strike="noStrike" cap="none" dirty="0" err="1">
+                <a:solidFill>
+                  <a:srgbClr val="334155"/>
+                </a:solidFill>
+                <a:latin typeface="Lato"/>
+                <a:ea typeface="Lato"/>
+                <a:cs typeface="Lato"/>
+                <a:sym typeface="Lato"/>
+              </a:rPr>
+              <a:t>incertidumbre</a:t>
+            </a:r>
+            <a:r>
+              <a:rPr lang="en-US" sz="1500" b="0" i="0" u="none" strike="noStrike" cap="none" dirty="0">
+                <a:solidFill>
+                  <a:srgbClr val="334155"/>
+                </a:solidFill>
+                <a:latin typeface="Lato"/>
+                <a:ea typeface="Lato"/>
+                <a:cs typeface="Lato"/>
+                <a:sym typeface="Lato"/>
+              </a:rPr>
+              <a:t> para </a:t>
+            </a:r>
+            <a:r>
+              <a:rPr lang="en-US" sz="1500" b="0" i="0" u="none" strike="noStrike" cap="none" dirty="0" err="1">
+                <a:solidFill>
+                  <a:srgbClr val="334155"/>
+                </a:solidFill>
+                <a:latin typeface="Lato"/>
+                <a:ea typeface="Lato"/>
+                <a:cs typeface="Lato"/>
+                <a:sym typeface="Lato"/>
+              </a:rPr>
+              <a:t>el</a:t>
+            </a:r>
+            <a:r>
+              <a:rPr lang="en-US" sz="1500" b="0" i="0" u="none" strike="noStrike" cap="none" dirty="0">
+                <a:solidFill>
+                  <a:srgbClr val="334155"/>
+                </a:solidFill>
+                <a:latin typeface="Lato"/>
+                <a:ea typeface="Lato"/>
+                <a:cs typeface="Lato"/>
+                <a:sym typeface="Lato"/>
+              </a:rPr>
+              <a:t> </a:t>
+            </a:r>
+            <a:r>
+              <a:rPr lang="en-US" sz="1500" b="0" i="0" u="none" strike="noStrike" cap="none" dirty="0" err="1">
+                <a:solidFill>
+                  <a:srgbClr val="334155"/>
+                </a:solidFill>
+                <a:latin typeface="Lato"/>
+                <a:ea typeface="Lato"/>
+                <a:cs typeface="Lato"/>
+                <a:sym typeface="Lato"/>
+              </a:rPr>
+              <a:t>modelo</a:t>
+            </a:r>
+            <a:r>
+              <a:rPr lang="en-US" sz="1500" b="0" i="0" u="none" strike="noStrike" cap="none" dirty="0">
+                <a:solidFill>
+                  <a:srgbClr val="334155"/>
+                </a:solidFill>
+                <a:latin typeface="Lato"/>
+                <a:ea typeface="Lato"/>
+                <a:cs typeface="Lato"/>
+                <a:sym typeface="Lato"/>
+              </a:rPr>
+              <a:t>.</a:t>
+            </a:r>
+            <a:endParaRPr dirty="0"/>
           </a:p>
         </p:txBody>
       </p:sp>
@@ -22721,7 +23609,7 @@
               <a:buNone/>
             </a:pPr>
             <a:r>
-              <a:rPr lang="en-US" sz="1500" b="0" i="0" u="none" strike="noStrike" cap="none">
+              <a:rPr lang="en-US" sz="1500" b="0" i="0" u="none" strike="noStrike" cap="none" dirty="0">
                 <a:solidFill>
                   <a:srgbClr val="334155"/>
                 </a:solidFill>
@@ -22730,22 +23618,22 @@
                 <a:cs typeface="Lato"/>
                 <a:sym typeface="Lato"/>
               </a:rPr>
-              <a:t>Derivar el perfil a un </a:t>
-            </a:r>
-            <a:r>
-              <a:rPr lang="en-US" sz="1500" b="1" i="0" u="none" strike="noStrike" cap="none">
-                <a:solidFill>
-                  <a:srgbClr val="0F172A"/>
+              <a:t>Derivar </a:t>
+            </a:r>
+            <a:r>
+              <a:rPr lang="en-US" sz="1500" b="0" i="0" u="none" strike="noStrike" cap="none" dirty="0" err="1">
+                <a:solidFill>
+                  <a:srgbClr val="334155"/>
                 </a:solidFill>
                 <a:latin typeface="Lato"/>
                 <a:ea typeface="Lato"/>
                 <a:cs typeface="Lato"/>
                 <a:sym typeface="Lato"/>
               </a:rPr>
-              <a:t>comité de riesgos</a:t>
-            </a:r>
-            <a:r>
-              <a:rPr lang="en-US" sz="1500" b="0" i="0" u="none" strike="noStrike" cap="none">
+              <a:t>el</a:t>
+            </a:r>
+            <a:r>
+              <a:rPr lang="en-US" sz="1500" b="0" i="0" u="none" strike="noStrike" cap="none" dirty="0">
                 <a:solidFill>
                   <a:srgbClr val="334155"/>
                 </a:solidFill>
@@ -22754,9 +23642,105 @@
                 <a:cs typeface="Lato"/>
                 <a:sym typeface="Lato"/>
               </a:rPr>
-              <a:t> para evaluación manual.</a:t>
-            </a:r>
-            <a:endParaRPr/>
+              <a:t> </a:t>
+            </a:r>
+            <a:r>
+              <a:rPr lang="en-US" sz="1500" b="0" i="0" u="none" strike="noStrike" cap="none" dirty="0" err="1">
+                <a:solidFill>
+                  <a:srgbClr val="334155"/>
+                </a:solidFill>
+                <a:latin typeface="Lato"/>
+                <a:ea typeface="Lato"/>
+                <a:cs typeface="Lato"/>
+                <a:sym typeface="Lato"/>
+              </a:rPr>
+              <a:t>perfil</a:t>
+            </a:r>
+            <a:r>
+              <a:rPr lang="en-US" sz="1500" b="0" i="0" u="none" strike="noStrike" cap="none" dirty="0">
+                <a:solidFill>
+                  <a:srgbClr val="334155"/>
+                </a:solidFill>
+                <a:latin typeface="Lato"/>
+                <a:ea typeface="Lato"/>
+                <a:cs typeface="Lato"/>
+                <a:sym typeface="Lato"/>
+              </a:rPr>
+              <a:t> a un </a:t>
+            </a:r>
+            <a:r>
+              <a:rPr lang="en-US" sz="1500" b="1" i="0" u="none" strike="noStrike" cap="none" dirty="0" err="1">
+                <a:solidFill>
+                  <a:srgbClr val="0F172A"/>
+                </a:solidFill>
+                <a:latin typeface="Lato"/>
+                <a:ea typeface="Lato"/>
+                <a:cs typeface="Lato"/>
+                <a:sym typeface="Lato"/>
+              </a:rPr>
+              <a:t>comité</a:t>
+            </a:r>
+            <a:r>
+              <a:rPr lang="en-US" sz="1500" b="1" i="0" u="none" strike="noStrike" cap="none" dirty="0">
+                <a:solidFill>
+                  <a:srgbClr val="0F172A"/>
+                </a:solidFill>
+                <a:latin typeface="Lato"/>
+                <a:ea typeface="Lato"/>
+                <a:cs typeface="Lato"/>
+                <a:sym typeface="Lato"/>
+              </a:rPr>
+              <a:t> de </a:t>
+            </a:r>
+            <a:r>
+              <a:rPr lang="en-US" sz="1500" b="1" i="0" u="none" strike="noStrike" cap="none" dirty="0" err="1">
+                <a:solidFill>
+                  <a:srgbClr val="0F172A"/>
+                </a:solidFill>
+                <a:latin typeface="Lato"/>
+                <a:ea typeface="Lato"/>
+                <a:cs typeface="Lato"/>
+                <a:sym typeface="Lato"/>
+              </a:rPr>
+              <a:t>riesgos</a:t>
+            </a:r>
+            <a:r>
+              <a:rPr lang="en-US" sz="1500" b="0" i="0" u="none" strike="noStrike" cap="none" dirty="0">
+                <a:solidFill>
+                  <a:srgbClr val="334155"/>
+                </a:solidFill>
+                <a:latin typeface="Lato"/>
+                <a:ea typeface="Lato"/>
+                <a:cs typeface="Lato"/>
+                <a:sym typeface="Lato"/>
+              </a:rPr>
+              <a:t> para </a:t>
+            </a:r>
+            <a:r>
+              <a:rPr lang="en-US" sz="1500" b="0" i="0" u="none" strike="noStrike" cap="none" dirty="0" err="1">
+                <a:solidFill>
+                  <a:srgbClr val="334155"/>
+                </a:solidFill>
+                <a:latin typeface="Lato"/>
+                <a:ea typeface="Lato"/>
+                <a:cs typeface="Lato"/>
+                <a:sym typeface="Lato"/>
+              </a:rPr>
+              <a:t>evaluación</a:t>
+            </a:r>
+            <a:r>
+              <a:rPr lang="en-US" sz="1500" b="0" i="0" u="none" strike="noStrike" cap="none" dirty="0">
+                <a:solidFill>
+                  <a:srgbClr val="334155"/>
+                </a:solidFill>
+                <a:latin typeface="Lato"/>
+                <a:ea typeface="Lato"/>
+                <a:cs typeface="Lato"/>
+                <a:sym typeface="Lato"/>
+              </a:rPr>
+              <a:t> manual.</a:t>
+            </a:r>
+            <a:endParaRPr dirty="0"/>
           </a:p>
         </p:txBody>
       </p:sp>
@@ -23029,7 +24013,7 @@
               <a:buNone/>
             </a:pPr>
             <a:r>
-              <a:rPr lang="en-US" sz="1500" b="0" i="0" u="none" strike="noStrike" cap="none">
+              <a:rPr lang="en-US" sz="1500" b="0" i="0" u="none" strike="noStrike" cap="none" dirty="0" err="1">
                 <a:solidFill>
                   <a:srgbClr val="334155"/>
                 </a:solidFill>
@@ -23038,22 +24022,22 @@
                 <a:cs typeface="Lato"/>
                 <a:sym typeface="Lato"/>
               </a:rPr>
-              <a:t>Bloqueo preventivo y </a:t>
-            </a:r>
-            <a:r>
-              <a:rPr lang="en-US" sz="1500" b="1" i="0" u="none" strike="noStrike" cap="none">
-                <a:solidFill>
-                  <a:srgbClr val="0F172A"/>
+              <a:t>Bloqueo</a:t>
+            </a:r>
+            <a:r>
+              <a:rPr lang="en-US" sz="1500" b="0" i="0" u="none" strike="noStrike" cap="none" dirty="0">
+                <a:solidFill>
+                  <a:srgbClr val="334155"/>
                 </a:solidFill>
                 <a:latin typeface="Lato"/>
                 <a:ea typeface="Lato"/>
                 <a:cs typeface="Lato"/>
                 <a:sym typeface="Lato"/>
               </a:rPr>
-              <a:t>verificación humana</a:t>
-            </a:r>
-            <a:r>
-              <a:rPr lang="en-US" sz="1500" b="0" i="0" u="none" strike="noStrike" cap="none">
+              <a:t> </a:t>
+            </a:r>
+            <a:r>
+              <a:rPr lang="en-US" sz="1500" b="0" i="0" u="none" strike="noStrike" cap="none" dirty="0" err="1">
                 <a:solidFill>
                   <a:srgbClr val="334155"/>
                 </a:solidFill>
@@ -23062,9 +24046,81 @@
                 <a:cs typeface="Lato"/>
                 <a:sym typeface="Lato"/>
               </a:rPr>
-              <a:t> de la transacción.</a:t>
-            </a:r>
-            <a:endParaRPr/>
+              <a:t>preventivo</a:t>
+            </a:r>
+            <a:r>
+              <a:rPr lang="en-US" sz="1500" b="0" i="0" u="none" strike="noStrike" cap="none" dirty="0">
+                <a:solidFill>
+                  <a:srgbClr val="334155"/>
+                </a:solidFill>
+                <a:latin typeface="Lato"/>
+                <a:ea typeface="Lato"/>
+                <a:cs typeface="Lato"/>
+                <a:sym typeface="Lato"/>
+              </a:rPr>
+              <a:t> y </a:t>
+            </a:r>
+            <a:r>
+              <a:rPr lang="en-US" sz="1500" b="1" i="0" u="none" strike="noStrike" cap="none" dirty="0" err="1">
+                <a:solidFill>
+                  <a:srgbClr val="0F172A"/>
+                </a:solidFill>
+                <a:latin typeface="Lato"/>
+                <a:ea typeface="Lato"/>
+                <a:cs typeface="Lato"/>
+                <a:sym typeface="Lato"/>
+              </a:rPr>
+              <a:t>verificación</a:t>
+            </a:r>
+            <a:r>
+              <a:rPr lang="en-US" sz="1500" b="1" i="0" u="none" strike="noStrike" cap="none" dirty="0">
+                <a:solidFill>
+                  <a:srgbClr val="0F172A"/>
+                </a:solidFill>
+                <a:latin typeface="Lato"/>
+                <a:ea typeface="Lato"/>
+                <a:cs typeface="Lato"/>
+                <a:sym typeface="Lato"/>
+              </a:rPr>
+              <a:t> humana</a:t>
+            </a:r>
+            <a:r>
+              <a:rPr lang="en-US" sz="1500" b="0" i="0" u="none" strike="noStrike" cap="none" dirty="0">
+                <a:solidFill>
+                  <a:srgbClr val="334155"/>
+                </a:solidFill>
+                <a:latin typeface="Lato"/>
+                <a:ea typeface="Lato"/>
+                <a:cs typeface="Lato"/>
+                <a:sym typeface="Lato"/>
+              </a:rPr>
+              <a:t> de la </a:t>
+            </a:r>
+            <a:r>
+              <a:rPr lang="en-US" sz="1500" b="0" i="0" u="none" strike="noStrike" cap="none" dirty="0" err="1">
+                <a:solidFill>
+                  <a:srgbClr val="334155"/>
+                </a:solidFill>
+                <a:latin typeface="Lato"/>
+                <a:ea typeface="Lato"/>
+                <a:cs typeface="Lato"/>
+                <a:sym typeface="Lato"/>
+              </a:rPr>
+              <a:t>transacción</a:t>
+            </a:r>
+            <a:r>
+              <a:rPr lang="en-US" sz="1500" b="0" i="0" u="none" strike="noStrike" cap="none" dirty="0">
+                <a:solidFill>
+                  <a:srgbClr val="334155"/>
+                </a:solidFill>
+                <a:latin typeface="Lato"/>
+                <a:ea typeface="Lato"/>
+                <a:cs typeface="Lato"/>
+                <a:sym typeface="Lato"/>
+              </a:rPr>
+              <a:t>.</a:t>
+            </a:r>
+            <a:endParaRPr dirty="0"/>
           </a:p>
         </p:txBody>
       </p:sp>
@@ -23314,7 +24370,7 @@
               <a:buNone/>
             </a:pPr>
             <a:r>
-              <a:rPr lang="en-US" sz="1800" b="1" i="0" u="none" strike="noStrike" cap="none">
+              <a:rPr lang="en-US" sz="1800" b="1" i="0" u="none" strike="noStrike" cap="none" dirty="0">
                 <a:solidFill>
                   <a:srgbClr val="0F172A"/>
                 </a:solidFill>
@@ -23323,9 +24379,45 @@
                 <a:cs typeface="Poppins"/>
                 <a:sym typeface="Poppins"/>
               </a:rPr>
-              <a:t>QDA: Flexibilidad Cuadrática</a:t>
-            </a:r>
-            <a:endParaRPr/>
+              <a:t>QDA: </a:t>
+            </a:r>
+            <a:r>
+              <a:rPr lang="en-US" sz="1800" b="1" i="0" u="none" strike="noStrike" cap="none" dirty="0" err="1">
+                <a:solidFill>
+                  <a:srgbClr val="0F172A"/>
+                </a:solidFill>
+                <a:latin typeface="Poppins"/>
+                <a:ea typeface="Poppins"/>
+                <a:cs typeface="Poppins"/>
+                <a:sym typeface="Poppins"/>
+              </a:rPr>
+              <a:t>Flexibilidad</a:t>
+            </a:r>
+            <a:r>
+              <a:rPr lang="en-US" sz="1800" b="1" i="0" u="none" strike="noStrike" cap="none" dirty="0">
+                <a:solidFill>
+                  <a:srgbClr val="0F172A"/>
+                </a:solidFill>
+                <a:latin typeface="Poppins"/>
+                <a:ea typeface="Poppins"/>
+                <a:cs typeface="Poppins"/>
+                <a:sym typeface="Poppins"/>
+              </a:rPr>
+              <a:t> </a:t>
+            </a:r>
+            <a:r>
+              <a:rPr lang="en-US" sz="1800" b="1" i="0" u="none" strike="noStrike" cap="none" dirty="0" err="1">
+                <a:solidFill>
+                  <a:srgbClr val="0F172A"/>
+                </a:solidFill>
+                <a:latin typeface="Poppins"/>
+                <a:ea typeface="Poppins"/>
+                <a:cs typeface="Poppins"/>
+                <a:sym typeface="Poppins"/>
+              </a:rPr>
+              <a:t>Cuadrática</a:t>
+            </a:r>
+            <a:endParaRPr dirty="0"/>
           </a:p>
         </p:txBody>
       </p:sp>
@@ -23415,7 +24507,7 @@
               <a:buNone/>
             </a:pPr>
             <a:r>
-              <a:rPr lang="en-US" sz="1800" b="0" i="0" u="none" strike="noStrike" cap="none">
+              <a:rPr lang="en-US" sz="1800" b="0" i="0" u="none" strike="noStrike" cap="none" dirty="0">
                 <a:solidFill>
                   <a:srgbClr val="64748B"/>
                 </a:solidFill>
@@ -23424,9 +24516,69 @@
                 <a:cs typeface="Lato"/>
                 <a:sym typeface="Lato"/>
               </a:rPr>
-              <a:t>Cuando las covarianzas difieren entre clases</a:t>
-            </a:r>
-            <a:endParaRPr/>
+              <a:t>Cuando las </a:t>
+            </a:r>
+            <a:r>
+              <a:rPr lang="en-US" sz="1800" b="0" i="0" u="none" strike="noStrike" cap="none" dirty="0" err="1">
+                <a:solidFill>
+                  <a:srgbClr val="64748B"/>
+                </a:solidFill>
+                <a:latin typeface="Lato"/>
+                <a:ea typeface="Lato"/>
+                <a:cs typeface="Lato"/>
+                <a:sym typeface="Lato"/>
+              </a:rPr>
+              <a:t>covarianzas</a:t>
+            </a:r>
+            <a:r>
+              <a:rPr lang="en-US" sz="1800" b="0" i="0" u="none" strike="noStrike" cap="none" dirty="0">
+                <a:solidFill>
+                  <a:srgbClr val="64748B"/>
+                </a:solidFill>
+                <a:latin typeface="Lato"/>
+                <a:ea typeface="Lato"/>
+                <a:cs typeface="Lato"/>
+                <a:sym typeface="Lato"/>
+              </a:rPr>
+              <a:t> </a:t>
+            </a:r>
+            <a:r>
+              <a:rPr lang="en-US" sz="1800" b="0" i="0" u="none" strike="noStrike" cap="none" dirty="0" err="1">
+                <a:solidFill>
+                  <a:srgbClr val="64748B"/>
+                </a:solidFill>
+                <a:latin typeface="Lato"/>
+                <a:ea typeface="Lato"/>
+                <a:cs typeface="Lato"/>
+                <a:sym typeface="Lato"/>
+              </a:rPr>
+              <a:t>difieren</a:t>
+            </a:r>
+            <a:r>
+              <a:rPr lang="en-US" sz="1800" b="0" i="0" u="none" strike="noStrike" cap="none" dirty="0">
+                <a:solidFill>
+                  <a:srgbClr val="64748B"/>
+                </a:solidFill>
+                <a:latin typeface="Lato"/>
+                <a:ea typeface="Lato"/>
+                <a:cs typeface="Lato"/>
+                <a:sym typeface="Lato"/>
+              </a:rPr>
+              <a:t> entre </a:t>
+            </a:r>
+            <a:r>
+              <a:rPr lang="en-US" sz="1800" b="0" i="0" u="none" strike="noStrike" cap="none" dirty="0" err="1">
+                <a:solidFill>
+                  <a:srgbClr val="64748B"/>
+                </a:solidFill>
+                <a:latin typeface="Lato"/>
+                <a:ea typeface="Lato"/>
+                <a:cs typeface="Lato"/>
+                <a:sym typeface="Lato"/>
+              </a:rPr>
+              <a:t>clases</a:t>
+            </a:r>
+            <a:endParaRPr dirty="0"/>
           </a:p>
         </p:txBody>
       </p:sp>
@@ -23478,7 +24630,7 @@
         </p:blipFill>
         <p:spPr>
           <a:xfrm>
-            <a:off x="0" y="0"/>
+            <a:off x="0" y="177700"/>
             <a:ext cx="12192000" cy="6858000"/>
           </a:xfrm>
           <a:prstGeom prst="rect">
@@ -23605,7 +24757,7 @@
               <a:buNone/>
             </a:pPr>
             <a:r>
-              <a:rPr lang="en-US" sz="1500" b="1" i="0" u="none" strike="noStrike" cap="none">
+              <a:rPr lang="en-US" sz="1500" b="1" i="0" u="none" strike="noStrike" cap="none" dirty="0">
                 <a:solidFill>
                   <a:srgbClr val="0F172A"/>
                 </a:solidFill>
@@ -23617,7 +24769,7 @@
               <a:t>LDA</a:t>
             </a:r>
             <a:r>
-              <a:rPr lang="en-US" sz="1500" b="0" i="0" u="none" strike="noStrike" cap="none">
+              <a:rPr lang="en-US" sz="1500" b="0" i="0" u="none" strike="noStrike" cap="none" dirty="0">
                 <a:solidFill>
                   <a:srgbClr val="334155"/>
                 </a:solidFill>
@@ -23626,9 +24778,321 @@
                 <a:cs typeface="Lato"/>
                 <a:sym typeface="Lato"/>
               </a:rPr>
-              <a:t> asume que todas las clases comparten la misma matriz de covarianza Σ. Todas las "nubes" tienen la misma forma.</a:t>
-            </a:r>
-            <a:endParaRPr/>
+              <a:t> </a:t>
+            </a:r>
+            <a:r>
+              <a:rPr lang="en-US" sz="1500" b="0" i="0" u="none" strike="noStrike" cap="none" dirty="0" err="1">
+                <a:solidFill>
+                  <a:srgbClr val="334155"/>
+                </a:solidFill>
+                <a:latin typeface="Lato"/>
+                <a:ea typeface="Lato"/>
+                <a:cs typeface="Lato"/>
+                <a:sym typeface="Lato"/>
+              </a:rPr>
+              <a:t>asume</a:t>
+            </a:r>
+            <a:r>
+              <a:rPr lang="en-US" sz="1500" b="0" i="0" u="none" strike="noStrike" cap="none" dirty="0">
+                <a:solidFill>
+                  <a:srgbClr val="334155"/>
+                </a:solidFill>
+                <a:latin typeface="Lato"/>
+                <a:ea typeface="Lato"/>
+                <a:cs typeface="Lato"/>
+                <a:sym typeface="Lato"/>
+              </a:rPr>
+              <a:t> </a:t>
+            </a:r>
+            <a:r>
+              <a:rPr lang="en-US" sz="1500" b="0" i="0" u="none" strike="noStrike" cap="none" dirty="0" err="1">
+                <a:solidFill>
+                  <a:srgbClr val="334155"/>
+                </a:solidFill>
+                <a:latin typeface="Lato"/>
+                <a:ea typeface="Lato"/>
+                <a:cs typeface="Lato"/>
+                <a:sym typeface="Lato"/>
+              </a:rPr>
+              <a:t>que</a:t>
+            </a:r>
+            <a:r>
+              <a:rPr lang="en-US" sz="1500" b="0" i="0" u="none" strike="noStrike" cap="none" dirty="0">
+                <a:solidFill>
+                  <a:srgbClr val="334155"/>
+                </a:solidFill>
+                <a:latin typeface="Lato"/>
+                <a:ea typeface="Lato"/>
+                <a:cs typeface="Lato"/>
+                <a:sym typeface="Lato"/>
+              </a:rPr>
+              <a:t> </a:t>
+            </a:r>
+            <a:r>
+              <a:rPr lang="en-US" sz="1500" b="0" i="0" u="none" strike="noStrike" cap="none" dirty="0" err="1">
+                <a:solidFill>
+                  <a:srgbClr val="334155"/>
+                </a:solidFill>
+                <a:latin typeface="Lato"/>
+                <a:ea typeface="Lato"/>
+                <a:cs typeface="Lato"/>
+                <a:sym typeface="Lato"/>
+              </a:rPr>
+              <a:t>todas</a:t>
+            </a:r>
+            <a:r>
+              <a:rPr lang="en-US" sz="1500" b="0" i="0" u="none" strike="noStrike" cap="none" dirty="0">
+                <a:solidFill>
+                  <a:srgbClr val="334155"/>
+                </a:solidFill>
+                <a:latin typeface="Lato"/>
+                <a:ea typeface="Lato"/>
+                <a:cs typeface="Lato"/>
+                <a:sym typeface="Lato"/>
+              </a:rPr>
+              <a:t> las </a:t>
+            </a:r>
+            <a:r>
+              <a:rPr lang="en-US" sz="1500" b="0" i="0" u="none" strike="noStrike" cap="none" dirty="0" err="1">
+                <a:solidFill>
+                  <a:srgbClr val="334155"/>
+                </a:solidFill>
+                <a:latin typeface="Lato"/>
+                <a:ea typeface="Lato"/>
+                <a:cs typeface="Lato"/>
+                <a:sym typeface="Lato"/>
+              </a:rPr>
+              <a:t>clases</a:t>
+            </a:r>
+            <a:r>
+              <a:rPr lang="en-US" sz="1500" b="0" i="0" u="none" strike="noStrike" cap="none" dirty="0">
+                <a:solidFill>
+                  <a:srgbClr val="334155"/>
+                </a:solidFill>
+                <a:latin typeface="Lato"/>
+                <a:ea typeface="Lato"/>
+                <a:cs typeface="Lato"/>
+                <a:sym typeface="Lato"/>
+              </a:rPr>
+              <a:t> </a:t>
+            </a:r>
+            <a:r>
+              <a:rPr lang="en-US" sz="1500" b="0" i="0" u="none" strike="noStrike" cap="none" dirty="0" err="1">
+                <a:solidFill>
+                  <a:srgbClr val="334155"/>
+                </a:solidFill>
+                <a:latin typeface="Lato"/>
+                <a:ea typeface="Lato"/>
+                <a:cs typeface="Lato"/>
+                <a:sym typeface="Lato"/>
+              </a:rPr>
+              <a:t>comparten</a:t>
+            </a:r>
+            <a:r>
+              <a:rPr lang="en-US" sz="1500" b="0" i="0" u="none" strike="noStrike" cap="none" dirty="0">
+                <a:solidFill>
+                  <a:srgbClr val="334155"/>
+                </a:solidFill>
+                <a:latin typeface="Lato"/>
+                <a:ea typeface="Lato"/>
+                <a:cs typeface="Lato"/>
+                <a:sym typeface="Lato"/>
+              </a:rPr>
+              <a:t> la </a:t>
+            </a:r>
+            <a:r>
+              <a:rPr lang="en-US" sz="1500" b="0" i="0" u="none" strike="noStrike" cap="none" dirty="0" err="1">
+                <a:solidFill>
+                  <a:srgbClr val="334155"/>
+                </a:solidFill>
+                <a:latin typeface="Lato"/>
+                <a:ea typeface="Lato"/>
+                <a:cs typeface="Lato"/>
+                <a:sym typeface="Lato"/>
+              </a:rPr>
+              <a:t>misma</a:t>
+            </a:r>
+            <a:r>
+              <a:rPr lang="en-US" sz="1500" b="0" i="0" u="none" strike="noStrike" cap="none" dirty="0">
+                <a:solidFill>
+                  <a:srgbClr val="334155"/>
+                </a:solidFill>
+                <a:latin typeface="Lato"/>
+                <a:ea typeface="Lato"/>
+                <a:cs typeface="Lato"/>
+                <a:sym typeface="Lato"/>
+              </a:rPr>
+              <a:t> </a:t>
+            </a:r>
+            <a:r>
+              <a:rPr lang="en-US" sz="1500" b="0" i="0" u="none" strike="noStrike" cap="none" dirty="0" err="1">
+                <a:solidFill>
+                  <a:srgbClr val="334155"/>
+                </a:solidFill>
+                <a:latin typeface="Lato"/>
+                <a:ea typeface="Lato"/>
+                <a:cs typeface="Lato"/>
+                <a:sym typeface="Lato"/>
+              </a:rPr>
+              <a:t>matriz</a:t>
+            </a:r>
+            <a:r>
+              <a:rPr lang="en-US" sz="1500" b="0" i="0" u="none" strike="noStrike" cap="none" dirty="0">
+                <a:solidFill>
+                  <a:srgbClr val="334155"/>
+                </a:solidFill>
+                <a:latin typeface="Lato"/>
+                <a:ea typeface="Lato"/>
+                <a:cs typeface="Lato"/>
+                <a:sym typeface="Lato"/>
+              </a:rPr>
+              <a:t> de </a:t>
+            </a:r>
+            <a:r>
+              <a:rPr lang="en-US" sz="1500" b="0" i="0" u="none" strike="noStrike" cap="none" dirty="0" err="1">
+                <a:solidFill>
+                  <a:srgbClr val="334155"/>
+                </a:solidFill>
+                <a:latin typeface="Lato"/>
+                <a:ea typeface="Lato"/>
+                <a:cs typeface="Lato"/>
+                <a:sym typeface="Lato"/>
+              </a:rPr>
+              <a:t>covarianza</a:t>
+            </a:r>
+            <a:r>
+              <a:rPr lang="en-US" sz="1500" b="0" i="0" u="none" strike="noStrike" cap="none" dirty="0">
+                <a:solidFill>
+                  <a:srgbClr val="334155"/>
+                </a:solidFill>
+                <a:latin typeface="Lato"/>
+                <a:ea typeface="Lato"/>
+                <a:cs typeface="Lato"/>
+                <a:sym typeface="Lato"/>
+              </a:rPr>
+              <a:t> </a:t>
+            </a:r>
+            <a:r>
+              <a:rPr lang="en-US" sz="1500" b="0" i="0" u="none" strike="noStrike" cap="none" dirty="0" err="1">
+                <a:solidFill>
+                  <a:srgbClr val="334155"/>
+                </a:solidFill>
+                <a:latin typeface="Lato"/>
+                <a:ea typeface="Lato"/>
+                <a:cs typeface="Lato"/>
+                <a:sym typeface="Lato"/>
+              </a:rPr>
+              <a:t>Σ</a:t>
+            </a:r>
+            <a:r>
+              <a:rPr lang="en-US" sz="1500" b="0" i="0" u="none" strike="noStrike" cap="none" dirty="0">
+                <a:solidFill>
+                  <a:srgbClr val="334155"/>
+                </a:solidFill>
+                <a:latin typeface="Lato"/>
+                <a:ea typeface="Lato"/>
+                <a:cs typeface="Lato"/>
+                <a:sym typeface="Lato"/>
+              </a:rPr>
+              <a:t>. </a:t>
+            </a:r>
+            <a:r>
+              <a:rPr lang="en-US" sz="1500" b="0" i="0" u="none" strike="noStrike" cap="none" dirty="0" err="1">
+                <a:solidFill>
+                  <a:srgbClr val="334155"/>
+                </a:solidFill>
+                <a:latin typeface="Lato"/>
+                <a:ea typeface="Lato"/>
+                <a:cs typeface="Lato"/>
+                <a:sym typeface="Lato"/>
+              </a:rPr>
+              <a:t>Todas</a:t>
+            </a:r>
+            <a:r>
+              <a:rPr lang="en-US" sz="1500" b="0" i="0" u="none" strike="noStrike" cap="none" dirty="0">
+                <a:solidFill>
+                  <a:srgbClr val="334155"/>
+                </a:solidFill>
+                <a:latin typeface="Lato"/>
+                <a:ea typeface="Lato"/>
+                <a:cs typeface="Lato"/>
+                <a:sym typeface="Lato"/>
+              </a:rPr>
+              <a:t> las "</a:t>
+            </a:r>
+            <a:r>
+              <a:rPr lang="en-US" sz="1500" b="0" i="0" u="none" strike="noStrike" cap="none" dirty="0" err="1">
+                <a:solidFill>
+                  <a:srgbClr val="334155"/>
+                </a:solidFill>
+                <a:latin typeface="Lato"/>
+                <a:ea typeface="Lato"/>
+                <a:cs typeface="Lato"/>
+                <a:sym typeface="Lato"/>
+              </a:rPr>
+              <a:t>nubes</a:t>
+            </a:r>
+            <a:r>
+              <a:rPr lang="en-US" sz="1500" b="0" i="0" u="none" strike="noStrike" cap="none" dirty="0">
+                <a:solidFill>
+                  <a:srgbClr val="334155"/>
+                </a:solidFill>
+                <a:latin typeface="Lato"/>
+                <a:ea typeface="Lato"/>
+                <a:cs typeface="Lato"/>
+                <a:sym typeface="Lato"/>
+              </a:rPr>
+              <a:t>" </a:t>
+            </a:r>
+            <a:r>
+              <a:rPr lang="en-US" sz="1500" b="0" i="0" u="none" strike="noStrike" cap="none" dirty="0" err="1">
+                <a:solidFill>
+                  <a:srgbClr val="334155"/>
+                </a:solidFill>
+                <a:latin typeface="Lato"/>
+                <a:ea typeface="Lato"/>
+                <a:cs typeface="Lato"/>
+                <a:sym typeface="Lato"/>
+              </a:rPr>
+              <a:t>tienen</a:t>
+            </a:r>
+            <a:r>
+              <a:rPr lang="en-US" sz="1500" b="0" i="0" u="none" strike="noStrike" cap="none" dirty="0">
+                <a:solidFill>
+                  <a:srgbClr val="334155"/>
+                </a:solidFill>
+                <a:latin typeface="Lato"/>
+                <a:ea typeface="Lato"/>
+                <a:cs typeface="Lato"/>
+                <a:sym typeface="Lato"/>
+              </a:rPr>
+              <a:t> la </a:t>
+            </a:r>
+            <a:r>
+              <a:rPr lang="en-US" sz="1500" b="0" i="0" u="none" strike="noStrike" cap="none" dirty="0" err="1">
+                <a:solidFill>
+                  <a:srgbClr val="334155"/>
+                </a:solidFill>
+                <a:latin typeface="Lato"/>
+                <a:ea typeface="Lato"/>
+                <a:cs typeface="Lato"/>
+                <a:sym typeface="Lato"/>
+              </a:rPr>
+              <a:t>misma</a:t>
+            </a:r>
+            <a:r>
+              <a:rPr lang="en-US" sz="1500" b="0" i="0" u="none" strike="noStrike" cap="none" dirty="0">
+                <a:solidFill>
+                  <a:srgbClr val="334155"/>
+                </a:solidFill>
+                <a:latin typeface="Lato"/>
+                <a:ea typeface="Lato"/>
+                <a:cs typeface="Lato"/>
+                <a:sym typeface="Lato"/>
+              </a:rPr>
+              <a:t> forma.</a:t>
+            </a:r>
+            <a:endParaRPr dirty="0"/>
           </a:p>
         </p:txBody>
       </p:sp>
@@ -23786,7 +25250,7 @@
               <a:buNone/>
             </a:pPr>
             <a:r>
-              <a:rPr lang="en-US" sz="3000" b="1" i="0" u="none" strike="noStrike" cap="none">
+              <a:rPr lang="en-US" sz="3000" b="1" i="0" u="none" strike="noStrike" cap="none" dirty="0" err="1">
                 <a:solidFill>
                   <a:srgbClr val="0F172A"/>
                 </a:solidFill>
@@ -23795,9 +25259,33 @@
                 <a:cs typeface="Poppins"/>
                 <a:sym typeface="Poppins"/>
               </a:rPr>
-              <a:t>Homocedasticidad vs Heterocedasticidad</a:t>
-            </a:r>
-            <a:endParaRPr/>
+              <a:t>Homocedasticidad</a:t>
+            </a:r>
+            <a:r>
+              <a:rPr lang="en-US" sz="3000" b="1" i="0" u="none" strike="noStrike" cap="none" dirty="0">
+                <a:solidFill>
+                  <a:srgbClr val="0F172A"/>
+                </a:solidFill>
+                <a:latin typeface="Poppins"/>
+                <a:ea typeface="Poppins"/>
+                <a:cs typeface="Poppins"/>
+                <a:sym typeface="Poppins"/>
+              </a:rPr>
+              <a:t> vs </a:t>
+            </a:r>
+            <a:r>
+              <a:rPr lang="en-US" sz="3000" b="1" i="0" u="none" strike="noStrike" cap="none" dirty="0" err="1">
+                <a:solidFill>
+                  <a:srgbClr val="0F172A"/>
+                </a:solidFill>
+                <a:latin typeface="Poppins"/>
+                <a:ea typeface="Poppins"/>
+                <a:cs typeface="Poppins"/>
+                <a:sym typeface="Poppins"/>
+              </a:rPr>
+              <a:t>Heterocedasticidad</a:t>
+            </a:r>
+            <a:endParaRPr dirty="0"/>
           </a:p>
         </p:txBody>
       </p:sp>
@@ -24914,7 +26402,7 @@
                         <a:buNone/>
                       </a:pPr>
                       <a:r>
-                        <a:rPr lang="en-US" sz="1500" b="1" i="0" u="none" strike="noStrike" cap="none">
+                        <a:rPr lang="en-US" sz="1500" b="1" i="0" u="none" strike="noStrike" cap="none" dirty="0">
                           <a:solidFill>
                             <a:srgbClr val="334155"/>
                           </a:solidFill>
@@ -24925,7 +26413,7 @@
                         </a:rPr>
                         <a:t>Riesgo Overfit</a:t>
                       </a:r>
-                      <a:endParaRPr/>
+                      <a:endParaRPr dirty="0"/>
                     </a:p>
                   </a:txBody>
                   <a:tcPr marL="63500" marR="63500" marT="25400" marB="25400" anchor="ctr">
@@ -24990,7 +26478,7 @@
                         <a:buNone/>
                       </a:pPr>
                       <a:r>
-                        <a:rPr lang="en-US" sz="1500" b="0" i="0" u="none" strike="noStrike" cap="none">
+                        <a:rPr lang="en-US" sz="1500" b="0" i="0" u="none" strike="noStrike" cap="none" dirty="0">
                           <a:solidFill>
                             <a:srgbClr val="334155"/>
                           </a:solidFill>
@@ -25001,7 +26489,7 @@
                         </a:rPr>
                         <a:t>Bajo</a:t>
                       </a:r>
-                      <a:endParaRPr/>
+                      <a:endParaRPr dirty="0"/>
                     </a:p>
                   </a:txBody>
                   <a:tcPr marL="63500" marR="63500" marT="25400" marB="25400" anchor="ctr">
@@ -25066,7 +26554,7 @@
                         <a:buNone/>
                       </a:pPr>
                       <a:r>
-                        <a:rPr lang="en-US" sz="1500" b="0" i="0" u="none" strike="noStrike" cap="none">
+                        <a:rPr lang="en-US" sz="1500" b="0" i="0" u="none" strike="noStrike" cap="none" dirty="0">
                           <a:solidFill>
                             <a:srgbClr val="334155"/>
                           </a:solidFill>
@@ -25075,9 +26563,33 @@
                           <a:cs typeface="Lato"/>
                           <a:sym typeface="Lato"/>
                         </a:rPr>
-                        <a:t>Mayor (Alta flexibilidad)</a:t>
+                        <a:t>Mayor (Alta </a:t>
                       </a:r>
-                      <a:endParaRPr/>
+                      <a:r>
+                        <a:rPr lang="en-US" sz="1500" b="0" i="0" u="none" strike="noStrike" cap="none" dirty="0" err="1">
+                          <a:solidFill>
+                            <a:srgbClr val="334155"/>
+                          </a:solidFill>
+                          <a:latin typeface="Lato"/>
+                          <a:ea typeface="Lato"/>
+                          <a:cs typeface="Lato"/>
+                          <a:sym typeface="Lato"/>
+                        </a:rPr>
+                        <a:t>flexibilidad</a:t>
+                      </a:r>
+                      <a:r>
+                        <a:rPr lang="en-US" sz="1500" b="0" i="0" u="none" strike="noStrike" cap="none" dirty="0">
+                          <a:solidFill>
+                            <a:srgbClr val="334155"/>
+                          </a:solidFill>
+                          <a:latin typeface="Lato"/>
+                          <a:ea typeface="Lato"/>
+                          <a:cs typeface="Lato"/>
+                          <a:sym typeface="Lato"/>
+                        </a:rPr>
+                        <a:t>)</a:t>
+                      </a:r>
+                      <a:endParaRPr dirty="0"/>
                     </a:p>
                   </a:txBody>
                   <a:tcPr marL="63500" marR="63500" marT="25400" marB="25400" anchor="ctr">
